--- a/slide/pptx/P09-Komunikasi-Serial.pptx
+++ b/slide/pptx/P09-Komunikasi-Serial.pptx
@@ -130,21 +130,21 @@
   <p:extLst>
     <p:ext uri="{521415D9-36F7-43E2-AB2F-B90AF26B5E84}">
       <p14:sectionLst xmlns:p14="http://schemas.microsoft.com/office/powerpoint/2010/main">
-        <p14:section name="Pembuka" id="{b75dc721-68ff-fed2-80ba-a9adc5f4cd73}">
+        <p14:section name="Pembuka" id="{933f1273-b7dd-9229-fdcd-324c5bf8952e}">
           <p14:sldIdLst>
             <p14:sldId id="256"/>
             <p14:sldId id="257"/>
             <p14:sldId id="258"/>
           </p14:sldIdLst>
         </p14:section>
-        <p14:section name="Konsep" id="{dc69ffdf-e4df-131c-f7e1-406de7cbbcdf}">
+        <p14:section name="Konsep" id="{c4ab2adb-4379-9bb9-ab84-3e1b6dc17a94}">
           <p14:sldIdLst>
             <p14:sldId id="259"/>
             <p14:sldId id="260"/>
             <p14:sldId id="261"/>
           </p14:sldIdLst>
         </p14:section>
-        <p14:section name="UART" id="{36d85ec9-348e-0a90-7f85-afc23da936d8}">
+        <p14:section name="UART" id="{16269bf8-5862-bc25-b1cb-44d3b063177b}">
           <p14:sldIdLst>
             <p14:sldId id="262"/>
             <p14:sldId id="263"/>
@@ -153,7 +153,7 @@
             <p14:sldId id="266"/>
           </p14:sldIdLst>
         </p14:section>
-        <p14:section name="I2C" id="{bd34e3e0-463f-a725-b628-8041c3d11c5b}">
+        <p14:section name="I2C" id="{fc41f372-3f98-eaea-c5df-8df46207b7c6}">
           <p14:sldIdLst>
             <p14:sldId id="267"/>
             <p14:sldId id="268"/>
@@ -162,7 +162,7 @@
             <p14:sldId id="271"/>
           </p14:sldIdLst>
         </p14:section>
-        <p14:section name="SPI" id="{89da1508-4474-aa84-1d6a-a1c4d12353ab}">
+        <p14:section name="SPI" id="{085ad4c6-0d0f-b336-6d45-3d2a20521ed9}">
           <p14:sldIdLst>
             <p14:sldId id="272"/>
             <p14:sldId id="273"/>
@@ -172,7 +172,7 @@
             <p14:sldId id="277"/>
           </p14:sldIdLst>
         </p14:section>
-        <p14:section name="Penutup" id="{7bc5c774-4491-d05b-25ca-bf889213167a}">
+        <p14:section name="Penutup" id="{f2817974-ba2a-ce80-6f76-2c21c7761d64}">
           <p14:sldIdLst>
             <p14:sldId id="278"/>
             <p14:sldId id="279"/>
@@ -10927,7 +10927,7 @@
                   <a:schemeClr val="tx1"/>
                 </a:solidFill>
               </a:rPr>
-              <a:t>Uji: </a:t>
+              <a:t>Coba ketik: </a:t>
             </a:r>
             <a:r>
               <a:rPr lang="en-US" sz="1700" dirty="0">
@@ -10984,7 +10984,7 @@
                   <a:schemeClr val="tx1"/>
                 </a:solidFill>
               </a:rPr>
-              <a:t>, </a:t>
+              <a:t>, lalu </a:t>
             </a:r>
             <a:r>
               <a:rPr lang="en-US" sz="1700" dirty="0">
